--- a/output/slides/LearnFlow学习流动-答辩演示.pptx
+++ b/output/slides/LearnFlow学习流动-答辩演示.pptx
@@ -3581,7 +3581,7 @@
       </p:sp>
       <p:pic>
         <p:nvPicPr>
-          <p:cNvPr id="60" name="Image 0" descr="C:\Users\Asus\Documents\ChatGPT\REAL 大创\output\brand\buddy-cat.png">    </p:cNvPr>
+          <p:cNvPr id="60" name="Image 0" descr="C:\Users\Asus\Documents\ChatGPT\REAL 大创\output\brand\learnflow-logo.png">    </p:cNvPr>
           <p:cNvPicPr>
             <a:picLocks noChangeAspect="1"/>
           </p:cNvPicPr>
@@ -10117,7 +10117,7 @@
       </p:sp>
       <p:pic>
         <p:nvPicPr>
-          <p:cNvPr id="60" name="Image 0" descr="C:\Users\Asus\Documents\ChatGPT\REAL 大创\output\brand\buddy-cat.png">    </p:cNvPr>
+          <p:cNvPr id="60" name="Image 0" descr="C:\Users\Asus\Documents\ChatGPT\REAL 大创\output\brand\learnflow-logo.png">    </p:cNvPr>
           <p:cNvPicPr>
             <a:picLocks noChangeAspect="1"/>
           </p:cNvPicPr>

--- a/output/slides/LearnFlow学习流动-答辩演示.pptx
+++ b/output/slides/LearnFlow学习流动-答辩演示.pptx
@@ -1397,7 +1397,7 @@
           <a:p>
             <a:r>
               <a:rPr lang="en-US" dirty="0"/>
-              <a:t>当前原型已经完成逐题初始化、策略选择、真实本机模型对话、回答后的可编辑建议，以及学习块确认生成 PDF 和再次打开。线上网页通过本机确认配对继续在原页面学习。此通道依赖本机安装与登录，不是 LearnBuddy 原生 API；团队尚无审核通过的正式第三方应用。策略广场仍为本地预置内容，尚未验证多人社区和学习效果。</a:t>
+              <a:t>当前原型已完成逐题初始化、策略选择、连接成功提示、模型选择、图片与文件拖拽、回答后的可编辑建议，以及学习块确认生成 PDF 和再次打开。现场已验证自动模型读图，并切换 hy3 阅读 17 页 PDF。PDF 当前提取文字，扫描件需要截图；原始附件不自动保存。线上网页经本机确认配对，在原页面继续学习。此通道依赖本机安装与正常登录，不是 LearnBuddy 原生 API；腾讯正式应用审核、多人社区和学习效果验证仍待完成。</a:t>
             </a:r>
             <a:endParaRPr lang="en-US" dirty="0"/>
           </a:p>
@@ -12565,7 +12565,7 @@
                 <a:ea typeface="Microsoft YaHei" pitchFamily="34" charset="-122"/>
                 <a:cs typeface="Microsoft YaHei" pitchFamily="34" charset="-120"/>
               </a:rPr>
-              <a:t>逐题引导 · 学习策略 · 学习块 · 学习资产</a:t>
+              <a:t>逐题引导 · 连接即验证 · 模型可选择 · 资料可保存</a:t>
             </a:r>
             <a:endParaRPr lang="en-US" sz="1550" dirty="0"/>
           </a:p>
@@ -12807,7 +12807,7 @@
                 <a:ea typeface="Microsoft YaHei" pitchFamily="34" charset="-122"/>
                 <a:cs typeface="Microsoft YaHei" pitchFamily="34" charset="-120"/>
               </a:rPr>
-              <a:t>本机模型真实对话</a:t>
+              <a:t>真实对话、读图与 PDF 文字</a:t>
             </a:r>
             <a:endParaRPr lang="en-US" sz="1700" dirty="0"/>
           </a:p>
